--- a/decks/hist-williams-control/hist-williams-control_ch1_england-before-1066.pptx
+++ b/decks/hist-williams-control/hist-williams-control_ch1_england-before-1066.pptx
@@ -126,30 +126,30 @@
   <p:extLst>
     <p:ext uri="{521415D9-36F7-43E2-AB2F-B90AF26B5E84}">
       <p14:sectionLst xmlns:p14="http://schemas.microsoft.com/office/powerpoint/2010/main">
-        <p14:section name="Opening" id="{ef9b309d-021c-1aaf-a293-9c3d4a32e306}">
+        <p14:section name="Opening" id="{d645bbb3-1d5e-c0ae-20ae-195d13afd772}">
           <p14:sldIdLst>
             <p14:sldId id="256"/>
           </p14:sldIdLst>
         </p14:section>
-        <p14:section name="Gate" id="{e3182369-fd9a-90be-8d00-f618d92f7aff}">
+        <p14:section name="Gate" id="{c3d607e2-41ed-d787-fc80-d3f696353ffe}">
           <p14:sldIdLst>
             <p14:sldId id="257"/>
             <p14:sldId id="258"/>
           </p14:sldIdLst>
         </p14:section>
-        <p14:section name="Pre-teach" id="{ad7e161a-171d-1227-c98f-aca64fc66654}">
+        <p14:section name="Pre-teach" id="{9d51792a-36aa-d164-c588-c92ab0915882}">
           <p14:sldIdLst>
             <p14:sldId id="259"/>
             <p14:sldId id="260"/>
           </p14:sldIdLst>
         </p14:section>
-        <p14:section name="Read-along" id="{deaecdd3-578c-e2e0-b490-186b1fc23b03}">
+        <p14:section name="Read-along" id="{53729a94-b04b-45de-8995-52af99500568}">
           <p14:sldIdLst>
             <p14:sldId id="261"/>
             <p14:sldId id="262"/>
           </p14:sldIdLst>
         </p14:section>
-        <p14:section name="Teach" id="{7f04dfbb-471e-7520-76c1-ce20964cdcf7}">
+        <p14:section name="Teach" id="{e0f5106b-68e7-b608-fd32-99a62b803c15}">
           <p14:sldIdLst>
             <p14:sldId id="263"/>
             <p14:sldId id="264"/>
@@ -158,7 +158,7 @@
             <p14:sldId id="267"/>
           </p14:sldIdLst>
         </p14:section>
-        <p14:section name="Routes" id="{9e41dafe-af69-8747-bc1d-4ecaf35112cd}">
+        <p14:section name="Routes" id="{07cc23b3-a713-4c7d-6155-6cd85ca9f99c}">
           <p14:sldIdLst>
             <p14:sldId id="268"/>
             <p14:sldId id="269"/>
@@ -166,12 +166,12 @@
             <p14:sldId id="271"/>
           </p14:sldIdLst>
         </p14:section>
-        <p14:section name="Close" id="{d3a7ffec-39cc-ba3d-dfe4-2b1bebe79d86}">
+        <p14:section name="Close" id="{51c42283-7c43-f745-f349-7153b5c8516f}">
           <p14:sldIdLst>
             <p14:sldId id="272"/>
           </p14:sldIdLst>
         </p14:section>
-        <p14:section name="Answers" id="{4263e8c7-57e0-e59c-4ba4-03aa61ea373d}">
+        <p14:section name="Answers" id="{a34affa7-f60d-6204-8a94-b7e9a27c7581}">
           <p14:sldIdLst>
             <p14:sldId id="273"/>
             <p14:sldId id="274"/>
